--- a/modulo-2/PF1822-desarrollo-con-ia/produccion/videos/AE3-capsula.pptx
+++ b/modulo-2/PF1822-desarrollo-con-ia/produccion/videos/AE3-capsula.pptx
@@ -18,6 +18,7 @@
     <p:sldId id="263" r:id="rId17"/>
     <p:sldId id="264" r:id="rId18"/>
     <p:sldId id="265" r:id="rId19"/>
+    <p:sldId id="266" r:id="rId20"/>
   </p:sldIdLst>
   <p:sldSz cx="12192000" cy="6858000"/>
   <p:notesSz cx="6858000" cy="9144000"/>
@@ -161,7 +162,7 @@
           <a:p>
             <a:r>
               <a:rPr lang="es-CL" dirty="0"/>
-              <a:t>Te doy la bienvenida a la cápsula 3 del módulo 2: Diseño de prompts. "El prompt es la especificación".</a:t>
+              <a:t>Te doy la bienvenida a la cápsula 3 del módulo 2, Introducción a modelos generativos y consumo por API: Diseño de prompts. "El prompt es la especificación".</a:t>
             </a:r>
           </a:p>
         </p:txBody>
@@ -220,6 +221,65 @@
           <a:p>
             <a:r>
               <a:rPr lang="es-CL" dirty="0"/>
+              <a:t>Iterar. Cambiar una cosa a la vez, anotar qué cambió y qué efecto tuvo, y decidir con los resultados.</a:t>
+            </a:r>
+          </a:p>
+        </p:txBody>
+      </p:sp>
+    </p:spTree>
+  </p:cSld>
+  <p:clrMapOvr>
+    <a:masterClrMapping/>
+  </p:clrMapOvr>
+</p:notes>
+</file>
+
+<file path=ppt/notesSlides/notesSlide11.xml><?xml version="1.0" encoding="utf-8"?>
+<p:notes xmlns:a="http://schemas.openxmlformats.org/drawingml/2006/main" xmlns:r="http://schemas.openxmlformats.org/officeDocument/2006/relationships" xmlns:p="http://schemas.openxmlformats.org/presentationml/2006/main">
+  <p:cSld>
+    <p:spTree>
+      <p:nvGrpSpPr>
+        <p:cNvPr id="1" name=""/>
+        <p:cNvGrpSpPr/>
+        <p:nvPr/>
+      </p:nvGrpSpPr>
+      <p:grpSpPr>
+        <a:xfrm>
+          <a:off x="0" y="0"/>
+          <a:ext cx="0" cy="0"/>
+          <a:chOff x="0" y="0"/>
+          <a:chExt cx="0" cy="0"/>
+        </a:xfrm>
+      </p:grpSpPr>
+      <p:sp>
+        <p:nvSpPr>
+          <p:cNvPr id="2" name="Imagen de diapositiva"/>
+          <p:cNvSpPr>
+            <a:spLocks noGrp="1" noRot="1" noChangeAspect="1"/>
+          </p:cNvSpPr>
+          <p:nvPr>
+            <p:ph type="sldImg"/>
+          </p:nvPr>
+        </p:nvSpPr>
+        <p:spPr/>
+      </p:sp>
+      <p:sp>
+        <p:nvSpPr>
+          <p:cNvPr id="3" name="Notas"/>
+          <p:cNvSpPr>
+            <a:spLocks noGrp="1"/>
+          </p:cNvSpPr>
+          <p:nvPr>
+            <p:ph type="body" idx="1"/>
+          </p:nvPr>
+        </p:nvSpPr>
+        <p:spPr/>
+        <p:txBody>
+          <a:bodyPr/>
+          <a:lstStyle/>
+          <a:p>
+            <a:r>
+              <a:rPr lang="es-CL" dirty="0"/>
               <a:t>Tu tarea. Video interactivo y actividad 2, pasos 2 y 3.</a:t>
             </a:r>
           </a:p>
@@ -279,7 +339,7 @@
           <a:p>
             <a:r>
               <a:rPr lang="es-CL" dirty="0"/>
-              <a:t>Qué es un prompt. La entrada que le dice al modelo qué hacer. Estructura: mensaje de sistema (rol y reglas) y mensaje de usuario (la tarea y los datos).</a:t>
+              <a:t>Esta cápsula corresponde al aprendizaje esperado 3 del plan formativo: Formular prompts efectivos para modelos generativos en escenarios zero-shot o few-shot, considerando la tarea solicitada y los parámetros de generación disponibles. Sus criterios de evaluación son: Explica la función de un prompt en la interacción con modelos generativos, distinguiendo entre estrategias zero-shot y few-shot, e identificando sus ventajas y limitaciones básicas. Elabora prompts adecuados para tareas específicas, como resumen, generación de código o reformulación de texto, seleccionando la estrategia de prompting más apropiada según el objetivo. Ajusta un prompt de forma iterativa con base en los outputs obtenidos, describiendo los cambios realizados en términos de claridad, estructura o control del comportamiento del modelo.</a:t>
             </a:r>
           </a:p>
         </p:txBody>
@@ -338,7 +398,7 @@
           <a:p>
             <a:r>
               <a:rPr lang="es-CL" dirty="0"/>
-              <a:t>Tipos de prompting. Zero-shot: solo instrucciones. Few-shot: instrucciones más ejemplos de entrada y salida. Instruccional: pasos explícitos a seguir.</a:t>
+              <a:t>Qué es un prompt. La entrada que le dice al modelo qué hacer. Estructura: mensaje de sistema (rol y reglas) y mensaje de usuario (la tarea y los datos).</a:t>
             </a:r>
           </a:p>
         </p:txBody>
@@ -397,7 +457,7 @@
           <a:p>
             <a:r>
               <a:rPr lang="es-CL" dirty="0"/>
-              <a:t>Buenas prácticas. Claridad, rol definido, contexto suficiente, restricciones explícitas, evitar ambigüedad.</a:t>
+              <a:t>Tipos de prompting. Zero-shot: solo instrucciones. Few-shot: instrucciones más ejemplos de entrada y salida. Instruccional: pasos explícitos a seguir.</a:t>
             </a:r>
           </a:p>
         </p:txBody>
@@ -456,7 +516,7 @@
           <a:p>
             <a:r>
               <a:rPr lang="es-CL" dirty="0"/>
-              <a:t>Formato de salida. Pedir listas, JSON o tablas cuando otro programa va a leer la respuesta.</a:t>
+              <a:t>Buenas prácticas. Claridad, rol definido, contexto suficiente, restricciones explícitas, evitar ambigüedad.</a:t>
             </a:r>
           </a:p>
         </p:txBody>
@@ -515,7 +575,7 @@
           <a:p>
             <a:r>
               <a:rPr lang="es-CL" dirty="0"/>
-              <a:t>Ejemplos prácticos. Un prompt para generar código, uno para resumir, uno para validar y uno para reformular, con su salida.</a:t>
+              <a:t>Formato de salida. Pedir listas, JSON o tablas cuando otro programa va a leer la respuesta.</a:t>
             </a:r>
           </a:p>
         </p:txBody>
@@ -574,7 +634,7 @@
           <a:p>
             <a:r>
               <a:rPr lang="es-CL" dirty="0"/>
-              <a:t>Parámetros. temperature (variedad), max_tokens (largo máximo), top_p (acota las opciones). Para resúmenes, temperature baja.</a:t>
+              <a:t>Ejemplos prácticos. Un prompt para generar código, uno para resumir, uno para validar y uno para reformular, con su salida.</a:t>
             </a:r>
           </a:p>
         </p:txBody>
@@ -633,7 +693,7 @@
           <a:p>
             <a:r>
               <a:rPr lang="es-CL" dirty="0"/>
-              <a:t>Limitaciones. Alucinaciones, falta de control, sensibilidad a la redacción: un cambio pequeño de palabras cambia la respuesta.</a:t>
+              <a:t>Parámetros. temperature (variedad), max tokens (largo máximo), top p (acota las opciones). Para resúmenes, temperature baja.</a:t>
             </a:r>
           </a:p>
         </p:txBody>
@@ -692,7 +752,7 @@
           <a:p>
             <a:r>
               <a:rPr lang="es-CL" dirty="0"/>
-              <a:t>Iterar. Cambiar una cosa a la vez, anotar qué cambió y qué efecto tuvo, y decidir con los resultados.</a:t>
+              <a:t>Limitaciones. Alucinaciones, falta de control, sensibilidad a la redacción: un cambio pequeño de palabras cambia la respuesta.</a:t>
             </a:r>
           </a:p>
         </p:txBody>
@@ -841,6 +901,39 @@
       </p:sp>
       <p:sp>
         <p:nvSpPr>
+          <p:cNvPr id="7" name="Etiqueta"/>
+          <p:cNvSpPr txBox="1"/>
+          <p:nvPr/>
+        </p:nvSpPr>
+        <p:spPr>
+          <a:xfrm>
+            <a:off x="609600" y="609600"/>
+            <a:ext cx="7315200" cy="533400"/>
+          </a:xfrm>
+          <a:prstGeom prst="rect">
+            <a:avLst/>
+          </a:prstGeom>
+          <a:noFill/>
+        </p:spPr>
+        <p:txBody>
+          <a:bodyPr wrap="square" lIns="0" rIns="0" anchor="b">
+            <a:normAutofit/>
+          </a:bodyPr>
+          <a:lstStyle/>
+          <a:p>
+            <a:r>
+              <a:rPr lang="es-CL" sz="1200" b="1" dirty="0">
+                <a:solidFill>
+                  <a:srgbClr val="9FC3E6"/>
+                </a:solidFill>
+              </a:rPr>
+              <a:t>MÓDULO 2 · INTRODUCCIÓN A MODELOS GENERATIVOS Y CONSUMO POR API</a:t>
+            </a:r>
+          </a:p>
+        </p:txBody>
+      </p:sp>
+      <p:sp>
+        <p:nvSpPr>
           <p:cNvPr id="4" name="Título"/>
           <p:cNvSpPr txBox="1"/>
           <p:nvPr/>
@@ -903,6 +996,16 @@
               <a:t>"El prompt es la especificación".</a:t>
             </a:r>
           </a:p>
+          <a:p>
+            <a:r>
+              <a:rPr lang="es-CL" sz="2200" dirty="0">
+                <a:solidFill>
+                  <a:srgbClr val="E5E7EB"/>
+                </a:solidFill>
+              </a:rPr>
+              <a:t>Contenido del plan: 3. DISEÑO DE PROMPTS PARA APIS GENERATIVAS</a:t>
+            </a:r>
+          </a:p>
         </p:txBody>
       </p:sp>
       <p:sp>
@@ -933,7 +1036,7 @@
                   <a:srgbClr val="CBD5E1"/>
                 </a:solidFill>
               </a:rPr>
-              <a:t>PF1822 · Módulo 2 · Cápsula 3 · AE3</a:t>
+              <a:t>PF1822 · Módulo 2 · Cápsula 3 · Aprendizaje esperado 3</a:t>
             </a:r>
           </a:p>
         </p:txBody>
@@ -987,14 +1090,57 @@
       </p:sp>
       <p:sp>
         <p:nvSpPr>
+          <p:cNvPr id="7" name="Etiqueta"/>
+          <p:cNvSpPr txBox="1"/>
+          <p:nvPr/>
+        </p:nvSpPr>
+        <p:spPr>
+          <a:xfrm>
+            <a:off x="609600" y="228600"/>
+            <a:ext cx="7315200" cy="914400"/>
+          </a:xfrm>
+          <a:prstGeom prst="rect">
+            <a:avLst/>
+          </a:prstGeom>
+          <a:noFill/>
+        </p:spPr>
+        <p:txBody>
+          <a:bodyPr wrap="square" lIns="0" rIns="0" anchor="b">
+            <a:normAutofit/>
+          </a:bodyPr>
+          <a:lstStyle/>
+          <a:p>
+            <a:r>
+              <a:rPr lang="es-CL" sz="1200" b="1" dirty="0">
+                <a:solidFill>
+                  <a:srgbClr val="0E7490"/>
+                </a:solidFill>
+              </a:rPr>
+              <a:t>CONTENIDO DEL PLAN (TEXTUAL)</a:t>
+            </a:r>
+          </a:p>
+          <a:p>
+            <a:r>
+              <a:rPr lang="es-CL" sz="1200" b="1" dirty="0">
+                <a:solidFill>
+                  <a:srgbClr val="0F3D5E"/>
+                </a:solidFill>
+              </a:rPr>
+              <a:t>ITERACIÓN Y AJUSTE DE PROMPTS SEGÚN RESULTADOS OBTENIDOS.</a:t>
+            </a:r>
+          </a:p>
+        </p:txBody>
+      </p:sp>
+      <p:sp>
+        <p:nvSpPr>
           <p:cNvPr id="3" name="Título"/>
           <p:cNvSpPr txBox="1"/>
           <p:nvPr/>
         </p:nvSpPr>
         <p:spPr>
           <a:xfrm>
-            <a:off x="609600" y="381000"/>
-            <a:ext cx="7315200" cy="990600"/>
+            <a:off x="609600" y="1181100"/>
+            <a:ext cx="7315200" cy="685800"/>
           </a:xfrm>
           <a:prstGeom prst="rect">
             <a:avLst/>
@@ -1008,12 +1154,12 @@
           <a:lstStyle/>
           <a:p>
             <a:r>
-              <a:rPr lang="es-CL" sz="3200" b="1" dirty="0">
+              <a:rPr lang="es-CL" sz="2800" b="1" dirty="0">
                 <a:solidFill>
                   <a:srgbClr val="0F3D5E"/>
                 </a:solidFill>
               </a:rPr>
-              <a:t>Tu tarea</a:t>
+              <a:t>Iterar</a:t>
             </a:r>
           </a:p>
         </p:txBody>
@@ -1026,7 +1172,7 @@
         </p:nvSpPr>
         <p:spPr>
           <a:xfrm>
-            <a:off x="609600" y="1447800"/>
+            <a:off x="609600" y="1943100"/>
             <a:ext cx="1066800" cy="50800"/>
           </a:xfrm>
           <a:prstGeom prst="rect">
@@ -1048,8 +1194,8 @@
         </p:nvSpPr>
         <p:spPr>
           <a:xfrm>
-            <a:off x="609600" y="1676400"/>
-            <a:ext cx="7315200" cy="4419600"/>
+            <a:off x="609600" y="2095500"/>
+            <a:ext cx="7315200" cy="4000500"/>
           </a:xfrm>
           <a:prstGeom prst="rect">
             <a:avLst/>
@@ -1078,7 +1224,7 @@
                   <a:srgbClr val="1F2937"/>
                 </a:solidFill>
               </a:rPr>
-              <a:t>Video interactivo R06 y actividad 2, pasos 2 y 3.</a:t>
+              <a:t>Cambiar una cosa a la vez, anotar qué cambió y qué efecto tuvo, y decidir con los resultados.</a:t>
             </a:r>
           </a:p>
         </p:txBody>
@@ -1111,7 +1257,218 @@
                   <a:srgbClr val="6B7280"/>
                 </a:solidFill>
               </a:rPr>
-              <a:t>PF1822 · Módulo 2 · Cápsula 3 · AE3</a:t>
+              <a:t>PF1822 · Módulo 2 · Cápsula 3 · Aprendizaje esperado 3</a:t>
+            </a:r>
+          </a:p>
+        </p:txBody>
+      </p:sp>
+    </p:spTree>
+  </p:cSld>
+  <p:clrMapOvr>
+    <a:masterClrMapping/>
+  </p:clrMapOvr>
+</p:sld>
+</file>
+
+<file path=ppt/slides/slide11.xml><?xml version="1.0" encoding="utf-8"?>
+<p:sld xmlns:a="http://schemas.openxmlformats.org/drawingml/2006/main" xmlns:r="http://schemas.openxmlformats.org/officeDocument/2006/relationships" xmlns:p="http://schemas.openxmlformats.org/presentationml/2006/main">
+  <p:cSld>
+    <p:spTree>
+      <p:nvGrpSpPr>
+        <p:cNvPr id="1" name=""/>
+        <p:cNvGrpSpPr/>
+        <p:nvPr/>
+      </p:nvGrpSpPr>
+      <p:grpSpPr>
+        <a:xfrm>
+          <a:off x="0" y="0"/>
+          <a:ext cx="0" cy="0"/>
+          <a:chOff x="0" y="0"/>
+          <a:chExt cx="0" cy="0"/>
+        </a:xfrm>
+      </p:grpSpPr>
+      <p:sp>
+        <p:nvSpPr>
+          <p:cNvPr id="2" name="Franja 2"/>
+          <p:cNvSpPr/>
+          <p:nvPr/>
+        </p:nvSpPr>
+        <p:spPr>
+          <a:xfrm>
+            <a:off x="0" y="0"/>
+            <a:ext cx="12192000" cy="152400"/>
+          </a:xfrm>
+          <a:prstGeom prst="rect">
+            <a:avLst/>
+          </a:prstGeom>
+          <a:solidFill>
+            <a:srgbClr val="0E7490"/>
+          </a:solidFill>
+          <a:ln>
+            <a:noFill/>
+          </a:ln>
+        </p:spPr>
+      </p:sp>
+      <p:sp>
+        <p:nvSpPr>
+          <p:cNvPr id="7" name="Etiqueta"/>
+          <p:cNvSpPr txBox="1"/>
+          <p:nvPr/>
+        </p:nvSpPr>
+        <p:spPr>
+          <a:xfrm>
+            <a:off x="609600" y="228600"/>
+            <a:ext cx="7315200" cy="914400"/>
+          </a:xfrm>
+          <a:prstGeom prst="rect">
+            <a:avLst/>
+          </a:prstGeom>
+          <a:noFill/>
+        </p:spPr>
+        <p:txBody>
+          <a:bodyPr wrap="square" lIns="0" rIns="0" anchor="b">
+            <a:normAutofit/>
+          </a:bodyPr>
+          <a:lstStyle/>
+          <a:p>
+            <a:r>
+              <a:rPr lang="es-CL" sz="1200" b="1" dirty="0">
+                <a:solidFill>
+                  <a:srgbClr val="0E7490"/>
+                </a:solidFill>
+              </a:rPr>
+              <a:t>PRÁCTICA DEL APRENDIZAJE ESPERADO 3</a:t>
+            </a:r>
+          </a:p>
+        </p:txBody>
+      </p:sp>
+      <p:sp>
+        <p:nvSpPr>
+          <p:cNvPr id="3" name="Título"/>
+          <p:cNvSpPr txBox="1"/>
+          <p:nvPr/>
+        </p:nvSpPr>
+        <p:spPr>
+          <a:xfrm>
+            <a:off x="609600" y="1181100"/>
+            <a:ext cx="7315200" cy="685800"/>
+          </a:xfrm>
+          <a:prstGeom prst="rect">
+            <a:avLst/>
+          </a:prstGeom>
+          <a:noFill/>
+        </p:spPr>
+        <p:txBody>
+          <a:bodyPr wrap="square" lIns="0" rIns="0" anchor="b">
+            <a:normAutofit/>
+          </a:bodyPr>
+          <a:lstStyle/>
+          <a:p>
+            <a:r>
+              <a:rPr lang="es-CL" sz="2800" b="1" dirty="0">
+                <a:solidFill>
+                  <a:srgbClr val="0F3D5E"/>
+                </a:solidFill>
+              </a:rPr>
+              <a:t>Tu tarea</a:t>
+            </a:r>
+          </a:p>
+        </p:txBody>
+      </p:sp>
+      <p:sp>
+        <p:nvSpPr>
+          <p:cNvPr id="4" name="Franja 4"/>
+          <p:cNvSpPr/>
+          <p:nvPr/>
+        </p:nvSpPr>
+        <p:spPr>
+          <a:xfrm>
+            <a:off x="609600" y="1943100"/>
+            <a:ext cx="1066800" cy="50800"/>
+          </a:xfrm>
+          <a:prstGeom prst="rect">
+            <a:avLst/>
+          </a:prstGeom>
+          <a:solidFill>
+            <a:srgbClr val="F59E0B"/>
+          </a:solidFill>
+          <a:ln>
+            <a:noFill/>
+          </a:ln>
+        </p:spPr>
+      </p:sp>
+      <p:sp>
+        <p:nvSpPr>
+          <p:cNvPr id="5" name="Contenido"/>
+          <p:cNvSpPr txBox="1"/>
+          <p:nvPr/>
+        </p:nvSpPr>
+        <p:spPr>
+          <a:xfrm>
+            <a:off x="609600" y="2095500"/>
+            <a:ext cx="7315200" cy="4000500"/>
+          </a:xfrm>
+          <a:prstGeom prst="rect">
+            <a:avLst/>
+          </a:prstGeom>
+          <a:noFill/>
+        </p:spPr>
+        <p:txBody>
+          <a:bodyPr wrap="square" lIns="0" rIns="0" anchor="t">
+            <a:normAutofit/>
+          </a:bodyPr>
+          <a:lstStyle/>
+          <a:p>
+            <a:pPr marL="342900" indent="-342900">
+              <a:spcBef>
+                <a:spcPts val="900"/>
+              </a:spcBef>
+              <a:buClr>
+                <a:srgbClr val="0E7490"/>
+              </a:buClr>
+              <a:buFont typeface="Arial"/>
+              <a:buChar char="•"/>
+            </a:pPr>
+            <a:r>
+              <a:rPr lang="es-CL" sz="2400" dirty="0">
+                <a:solidFill>
+                  <a:srgbClr val="1F2937"/>
+                </a:solidFill>
+              </a:rPr>
+              <a:t>Video interactivo R06 y actividad 2, pasos 2 y 3.</a:t>
+            </a:r>
+          </a:p>
+        </p:txBody>
+      </p:sp>
+      <p:sp>
+        <p:nvSpPr>
+          <p:cNvPr id="6" name="Pie"/>
+          <p:cNvSpPr txBox="1"/>
+          <p:nvPr/>
+        </p:nvSpPr>
+        <p:spPr>
+          <a:xfrm>
+            <a:off x="609600" y="6248400"/>
+            <a:ext cx="7315200" cy="381000"/>
+          </a:xfrm>
+          <a:prstGeom prst="rect">
+            <a:avLst/>
+          </a:prstGeom>
+          <a:noFill/>
+        </p:spPr>
+        <p:txBody>
+          <a:bodyPr wrap="square" lIns="0" rIns="0" anchor="t">
+            <a:normAutofit/>
+          </a:bodyPr>
+          <a:lstStyle/>
+          <a:p>
+            <a:r>
+              <a:rPr lang="es-CL" sz="1200" dirty="0">
+                <a:solidFill>
+                  <a:srgbClr val="6B7280"/>
+                </a:solidFill>
+              </a:rPr>
+              <a:t>PF1822 · Módulo 2 · Cápsula 3 · Aprendizaje esperado 3</a:t>
             </a:r>
           </a:p>
         </p:txBody>
@@ -1165,14 +1522,47 @@
       </p:sp>
       <p:sp>
         <p:nvSpPr>
+          <p:cNvPr id="7" name="Etiqueta"/>
+          <p:cNvSpPr txBox="1"/>
+          <p:nvPr/>
+        </p:nvSpPr>
+        <p:spPr>
+          <a:xfrm>
+            <a:off x="609600" y="228600"/>
+            <a:ext cx="7315200" cy="914400"/>
+          </a:xfrm>
+          <a:prstGeom prst="rect">
+            <a:avLst/>
+          </a:prstGeom>
+          <a:noFill/>
+        </p:spPr>
+        <p:txBody>
+          <a:bodyPr wrap="square" lIns="0" rIns="0" anchor="b">
+            <a:normAutofit/>
+          </a:bodyPr>
+          <a:lstStyle/>
+          <a:p>
+            <a:r>
+              <a:rPr lang="es-CL" sz="1200" b="1" dirty="0">
+                <a:solidFill>
+                  <a:srgbClr val="0E7490"/>
+                </a:solidFill>
+              </a:rPr>
+              <a:t>APRENDIZAJE Y CRITERIOS TEXTUALES DEL PLAN FORMATIVO</a:t>
+            </a:r>
+          </a:p>
+        </p:txBody>
+      </p:sp>
+      <p:sp>
+        <p:nvSpPr>
           <p:cNvPr id="3" name="Título"/>
           <p:cNvSpPr txBox="1"/>
           <p:nvPr/>
         </p:nvSpPr>
         <p:spPr>
           <a:xfrm>
-            <a:off x="609600" y="381000"/>
-            <a:ext cx="7315200" cy="990600"/>
+            <a:off x="609600" y="1181100"/>
+            <a:ext cx="7315200" cy="685800"/>
           </a:xfrm>
           <a:prstGeom prst="rect">
             <a:avLst/>
@@ -1186,12 +1576,12 @@
           <a:lstStyle/>
           <a:p>
             <a:r>
-              <a:rPr lang="es-CL" sz="3200" b="1" dirty="0">
+              <a:rPr lang="es-CL" sz="2800" b="1" dirty="0">
                 <a:solidFill>
                   <a:srgbClr val="0F3D5E"/>
                 </a:solidFill>
               </a:rPr>
-              <a:t>Qué es un prompt</a:t>
+              <a:t>Aprendizaje esperado 3</a:t>
             </a:r>
           </a:p>
         </p:txBody>
@@ -1204,7 +1594,7 @@
         </p:nvSpPr>
         <p:spPr>
           <a:xfrm>
-            <a:off x="609600" y="1447800"/>
+            <a:off x="609600" y="1943100"/>
             <a:ext cx="1066800" cy="50800"/>
           </a:xfrm>
           <a:prstGeom prst="rect">
@@ -1226,8 +1616,8 @@
         </p:nvSpPr>
         <p:spPr>
           <a:xfrm>
-            <a:off x="609600" y="1676400"/>
-            <a:ext cx="7315200" cy="4419600"/>
+            <a:off x="609600" y="2095500"/>
+            <a:ext cx="7315200" cy="4000500"/>
           </a:xfrm>
           <a:prstGeom prst="rect">
             <a:avLst/>
@@ -1251,12 +1641,28 @@
               <a:buChar char="•"/>
             </a:pPr>
             <a:r>
-              <a:rPr lang="es-CL" sz="2400" dirty="0">
+              <a:rPr lang="es-CL" sz="1300" b="1" dirty="0">
                 <a:solidFill>
                   <a:srgbClr val="1F2937"/>
                 </a:solidFill>
               </a:rPr>
-              <a:t>La entrada que le dice al modelo qué hacer.</a:t>
+              <a:t>FORMULAR PROMPTS EFECTIVOS PARA MODELOS GENERATIVOS EN ESCENARIOS ZERO-SHOT O FEW-SHOT, CONSIDERANDO LA TAREA SOLICITADA Y LOS PARÁMETROS DE GENERACIÓN DISPONIBLES.</a:t>
+            </a:r>
+          </a:p>
+          <a:p>
+            <a:pPr marL="0" indent="0">
+              <a:spcBef>
+                <a:spcPts val="1400"/>
+              </a:spcBef>
+              <a:buNone/>
+            </a:pPr>
+            <a:r>
+              <a:rPr lang="es-CL" sz="1100" b="1" dirty="0">
+                <a:solidFill>
+                  <a:srgbClr val="0E7490"/>
+                </a:solidFill>
+              </a:rPr>
+              <a:t>CRITERIOS DE EVALUACIÓN</a:t>
             </a:r>
           </a:p>
           <a:p>
@@ -1271,44 +1677,52 @@
               <a:buChar char="•"/>
             </a:pPr>
             <a:r>
-              <a:rPr lang="es-CL" sz="2400" dirty="0">
+              <a:rPr lang="es-CL" sz="1300" dirty="0">
                 <a:solidFill>
                   <a:srgbClr val="1F2937"/>
                 </a:solidFill>
               </a:rPr>
-              <a:t>Estructura: mensaje de </a:t>
-            </a:r>
-            <a:r>
-              <a:rPr lang="es-CL" sz="2400" b="1" dirty="0">
+              <a:t>3.1 EXPLICA LA FUNCIÓN DE UN PROMPT EN LA INTERACCIÓN CON MODELOS GENERATIVOS, DISTINGUIENDO ENTRE ESTRATEGIAS ZERO-SHOT Y FEW-SHOT, E IDENTIFICANDO SUS VENTAJAS Y LIMITACIONES BÁSICAS.</a:t>
+            </a:r>
+          </a:p>
+          <a:p>
+            <a:pPr marL="342900" indent="-342900">
+              <a:spcBef>
+                <a:spcPts val="900"/>
+              </a:spcBef>
+              <a:buClr>
+                <a:srgbClr val="0E7490"/>
+              </a:buClr>
+              <a:buFont typeface="Arial"/>
+              <a:buChar char="•"/>
+            </a:pPr>
+            <a:r>
+              <a:rPr lang="es-CL" sz="1300" dirty="0">
                 <a:solidFill>
                   <a:srgbClr val="1F2937"/>
                 </a:solidFill>
               </a:rPr>
-              <a:t>sistema</a:t>
-            </a:r>
-            <a:r>
-              <a:rPr lang="es-CL" sz="2400" dirty="0">
+              <a:t>3.2 ELABORA PROMPTS ADECUADOS PARA TAREAS ESPECÍFICAS, COMO RESUMEN, GENERACIÓN DE CÓDIGO O REFORMULACIÓN DE TEXTO, SELECCIONANDO LA ESTRATEGIA DE PROMPTING MÁS APROPIADA SEGÚN EL OBJETIVO.</a:t>
+            </a:r>
+          </a:p>
+          <a:p>
+            <a:pPr marL="342900" indent="-342900">
+              <a:spcBef>
+                <a:spcPts val="900"/>
+              </a:spcBef>
+              <a:buClr>
+                <a:srgbClr val="0E7490"/>
+              </a:buClr>
+              <a:buFont typeface="Arial"/>
+              <a:buChar char="•"/>
+            </a:pPr>
+            <a:r>
+              <a:rPr lang="es-CL" sz="1300" dirty="0">
                 <a:solidFill>
                   <a:srgbClr val="1F2937"/>
                 </a:solidFill>
               </a:rPr>
-              <a:t> (rol y reglas) y mensaje de </a:t>
-            </a:r>
-            <a:r>
-              <a:rPr lang="es-CL" sz="2400" b="1" dirty="0">
-                <a:solidFill>
-                  <a:srgbClr val="1F2937"/>
-                </a:solidFill>
-              </a:rPr>
-              <a:t>usuario</a:t>
-            </a:r>
-            <a:r>
-              <a:rPr lang="es-CL" sz="2400" dirty="0">
-                <a:solidFill>
-                  <a:srgbClr val="1F2937"/>
-                </a:solidFill>
-              </a:rPr>
-              <a:t> (la tarea y los datos).</a:t>
+              <a:t>3.3 AJUSTA UN PROMPT DE FORMA ITERATIVA CON BASE EN LOS OUTPUTS OBTENIDOS, DESCRIBIENDO LOS CAMBIOS REALIZADOS EN TÉRMINOS DE CLARIDAD, ESTRUCTURA O CONTROL DEL COMPORTAMIENTO DEL MODELO.</a:t>
             </a:r>
           </a:p>
         </p:txBody>
@@ -1341,7 +1755,7 @@
                   <a:srgbClr val="6B7280"/>
                 </a:solidFill>
               </a:rPr>
-              <a:t>PF1822 · Módulo 2 · Cápsula 3 · AE3</a:t>
+              <a:t>PF1822 · Módulo 2 · Cápsula 3 · Aprendizaje esperado 3</a:t>
             </a:r>
           </a:p>
         </p:txBody>
@@ -1395,14 +1809,67 @@
       </p:sp>
       <p:sp>
         <p:nvSpPr>
+          <p:cNvPr id="7" name="Etiqueta"/>
+          <p:cNvSpPr txBox="1"/>
+          <p:nvPr/>
+        </p:nvSpPr>
+        <p:spPr>
+          <a:xfrm>
+            <a:off x="609600" y="228600"/>
+            <a:ext cx="7315200" cy="914400"/>
+          </a:xfrm>
+          <a:prstGeom prst="rect">
+            <a:avLst/>
+          </a:prstGeom>
+          <a:noFill/>
+        </p:spPr>
+        <p:txBody>
+          <a:bodyPr wrap="square" lIns="0" rIns="0" anchor="b">
+            <a:normAutofit/>
+          </a:bodyPr>
+          <a:lstStyle/>
+          <a:p>
+            <a:r>
+              <a:rPr lang="es-CL" sz="1200" b="1" dirty="0">
+                <a:solidFill>
+                  <a:srgbClr val="0E7490"/>
+                </a:solidFill>
+              </a:rPr>
+              <a:t>CONTENIDO DEL PLAN (TEXTUAL)</a:t>
+            </a:r>
+          </a:p>
+          <a:p>
+            <a:r>
+              <a:rPr lang="es-CL" sz="1200" b="1" dirty="0">
+                <a:solidFill>
+                  <a:srgbClr val="0F3D5E"/>
+                </a:solidFill>
+              </a:rPr>
+              <a:t>QUÉ ES UN PROMPT.</a:t>
+            </a:r>
+          </a:p>
+          <a:p>
+            <a:r>
+              <a:rPr lang="es-CL" sz="1200" b="1" dirty="0">
+                <a:solidFill>
+                  <a:srgbClr val="0F3D5E"/>
+                </a:solidFill>
+              </a:rPr>
+              <a:t>ESTRUCTURA BÁSICA DE ENTRADA PARA MODELOS DE LENGUAJE.</a:t>
+            </a:r>
+          </a:p>
+        </p:txBody>
+      </p:sp>
+      <p:sp>
+        <p:nvSpPr>
           <p:cNvPr id="3" name="Título"/>
           <p:cNvSpPr txBox="1"/>
           <p:nvPr/>
         </p:nvSpPr>
         <p:spPr>
           <a:xfrm>
-            <a:off x="609600" y="381000"/>
-            <a:ext cx="7315200" cy="990600"/>
+            <a:off x="609600" y="1181100"/>
+            <a:ext cx="7315200" cy="685800"/>
           </a:xfrm>
           <a:prstGeom prst="rect">
             <a:avLst/>
@@ -1416,12 +1883,12 @@
           <a:lstStyle/>
           <a:p>
             <a:r>
-              <a:rPr lang="es-CL" sz="3200" b="1" dirty="0">
+              <a:rPr lang="es-CL" sz="2800" b="1" dirty="0">
                 <a:solidFill>
                   <a:srgbClr val="0F3D5E"/>
                 </a:solidFill>
               </a:rPr>
-              <a:t>Tipos de prompting</a:t>
+              <a:t>Qué es un prompt</a:t>
             </a:r>
           </a:p>
         </p:txBody>
@@ -1434,7 +1901,7 @@
         </p:nvSpPr>
         <p:spPr>
           <a:xfrm>
-            <a:off x="609600" y="1447800"/>
+            <a:off x="609600" y="1943100"/>
             <a:ext cx="1066800" cy="50800"/>
           </a:xfrm>
           <a:prstGeom prst="rect">
@@ -1456,8 +1923,8 @@
         </p:nvSpPr>
         <p:spPr>
           <a:xfrm>
-            <a:off x="609600" y="1676400"/>
-            <a:ext cx="7315200" cy="4419600"/>
+            <a:off x="609600" y="2095500"/>
+            <a:ext cx="7315200" cy="4000500"/>
           </a:xfrm>
           <a:prstGeom prst="rect">
             <a:avLst/>
@@ -1481,20 +1948,12 @@
               <a:buChar char="•"/>
             </a:pPr>
             <a:r>
-              <a:rPr lang="es-CL" sz="2400" b="1" dirty="0">
+              <a:rPr lang="es-CL" sz="2400" dirty="0">
                 <a:solidFill>
                   <a:srgbClr val="1F2937"/>
                 </a:solidFill>
               </a:rPr>
-              <a:t>Zero-shot</a:t>
-            </a:r>
-            <a:r>
-              <a:rPr lang="es-CL" sz="2400" dirty="0">
-                <a:solidFill>
-                  <a:srgbClr val="1F2937"/>
-                </a:solidFill>
-              </a:rPr>
-              <a:t>: solo instrucciones.</a:t>
+              <a:t>La entrada que le dice al modelo qué hacer.</a:t>
             </a:r>
           </a:p>
           <a:p>
@@ -1509,12 +1968,20 @@
               <a:buChar char="•"/>
             </a:pPr>
             <a:r>
+              <a:rPr lang="es-CL" sz="2400" dirty="0">
+                <a:solidFill>
+                  <a:srgbClr val="1F2937"/>
+                </a:solidFill>
+              </a:rPr>
+              <a:t>Estructura: mensaje de </a:t>
+            </a:r>
+            <a:r>
               <a:rPr lang="es-CL" sz="2400" b="1" dirty="0">
                 <a:solidFill>
                   <a:srgbClr val="1F2937"/>
                 </a:solidFill>
               </a:rPr>
-              <a:t>Few-shot</a:t>
+              <a:t>sistema</a:t>
             </a:r>
             <a:r>
               <a:rPr lang="es-CL" sz="2400" dirty="0">
@@ -1522,27 +1989,15 @@
                   <a:srgbClr val="1F2937"/>
                 </a:solidFill>
               </a:rPr>
-              <a:t>: instrucciones más ejemplos de entrada y salida.</a:t>
-            </a:r>
-          </a:p>
-          <a:p>
-            <a:pPr marL="342900" indent="-342900">
-              <a:spcBef>
-                <a:spcPts val="900"/>
-              </a:spcBef>
-              <a:buClr>
-                <a:srgbClr val="0E7490"/>
-              </a:buClr>
-              <a:buFont typeface="Arial"/>
-              <a:buChar char="•"/>
-            </a:pPr>
+              <a:t> (rol y reglas) y mensaje de </a:t>
+            </a:r>
             <a:r>
               <a:rPr lang="es-CL" sz="2400" b="1" dirty="0">
                 <a:solidFill>
                   <a:srgbClr val="1F2937"/>
                 </a:solidFill>
               </a:rPr>
-              <a:t>Instruccional</a:t>
+              <a:t>usuario</a:t>
             </a:r>
             <a:r>
               <a:rPr lang="es-CL" sz="2400" dirty="0">
@@ -1550,7 +2005,7 @@
                   <a:srgbClr val="1F2937"/>
                 </a:solidFill>
               </a:rPr>
-              <a:t>: pasos explícitos a seguir.</a:t>
+              <a:t> (la tarea y los datos).</a:t>
             </a:r>
           </a:p>
         </p:txBody>
@@ -1583,7 +2038,7 @@
                   <a:srgbClr val="6B7280"/>
                 </a:solidFill>
               </a:rPr>
-              <a:t>PF1822 · Módulo 2 · Cápsula 3 · AE3</a:t>
+              <a:t>PF1822 · Módulo 2 · Cápsula 3 · Aprendizaje esperado 3</a:t>
             </a:r>
           </a:p>
         </p:txBody>
@@ -1637,14 +2092,57 @@
       </p:sp>
       <p:sp>
         <p:nvSpPr>
+          <p:cNvPr id="7" name="Etiqueta"/>
+          <p:cNvSpPr txBox="1"/>
+          <p:nvPr/>
+        </p:nvSpPr>
+        <p:spPr>
+          <a:xfrm>
+            <a:off x="609600" y="228600"/>
+            <a:ext cx="7315200" cy="914400"/>
+          </a:xfrm>
+          <a:prstGeom prst="rect">
+            <a:avLst/>
+          </a:prstGeom>
+          <a:noFill/>
+        </p:spPr>
+        <p:txBody>
+          <a:bodyPr wrap="square" lIns="0" rIns="0" anchor="b">
+            <a:normAutofit/>
+          </a:bodyPr>
+          <a:lstStyle/>
+          <a:p>
+            <a:r>
+              <a:rPr lang="es-CL" sz="1200" b="1" dirty="0">
+                <a:solidFill>
+                  <a:srgbClr val="0E7490"/>
+                </a:solidFill>
+              </a:rPr>
+              <a:t>CONTENIDO DEL PLAN (TEXTUAL)</a:t>
+            </a:r>
+          </a:p>
+          <a:p>
+            <a:r>
+              <a:rPr lang="es-CL" sz="1200" b="1" dirty="0">
+                <a:solidFill>
+                  <a:srgbClr val="0F3D5E"/>
+                </a:solidFill>
+              </a:rPr>
+              <a:t>TIPOS DE PROMPTING: ZERO-SHOT, FEW-SHOT E INSTRUCTIONAL PROMPTING.</a:t>
+            </a:r>
+          </a:p>
+        </p:txBody>
+      </p:sp>
+      <p:sp>
+        <p:nvSpPr>
           <p:cNvPr id="3" name="Título"/>
           <p:cNvSpPr txBox="1"/>
           <p:nvPr/>
         </p:nvSpPr>
         <p:spPr>
           <a:xfrm>
-            <a:off x="609600" y="381000"/>
-            <a:ext cx="7315200" cy="990600"/>
+            <a:off x="609600" y="1181100"/>
+            <a:ext cx="7315200" cy="685800"/>
           </a:xfrm>
           <a:prstGeom prst="rect">
             <a:avLst/>
@@ -1658,12 +2156,12 @@
           <a:lstStyle/>
           <a:p>
             <a:r>
-              <a:rPr lang="es-CL" sz="3200" b="1" dirty="0">
+              <a:rPr lang="es-CL" sz="2800" b="1" dirty="0">
                 <a:solidFill>
                   <a:srgbClr val="0F3D5E"/>
                 </a:solidFill>
               </a:rPr>
-              <a:t>Buenas prácticas</a:t>
+              <a:t>Tipos de prompting</a:t>
             </a:r>
           </a:p>
         </p:txBody>
@@ -1676,7 +2174,7 @@
         </p:nvSpPr>
         <p:spPr>
           <a:xfrm>
-            <a:off x="609600" y="1447800"/>
+            <a:off x="609600" y="1943100"/>
             <a:ext cx="1066800" cy="50800"/>
           </a:xfrm>
           <a:prstGeom prst="rect">
@@ -1698,8 +2196,8 @@
         </p:nvSpPr>
         <p:spPr>
           <a:xfrm>
-            <a:off x="609600" y="1676400"/>
-            <a:ext cx="7315200" cy="4419600"/>
+            <a:off x="609600" y="2095500"/>
+            <a:ext cx="7315200" cy="4000500"/>
           </a:xfrm>
           <a:prstGeom prst="rect">
             <a:avLst/>
@@ -1723,12 +2221,76 @@
               <a:buChar char="•"/>
             </a:pPr>
             <a:r>
+              <a:rPr lang="es-CL" sz="2400" b="1" dirty="0">
+                <a:solidFill>
+                  <a:srgbClr val="1F2937"/>
+                </a:solidFill>
+              </a:rPr>
+              <a:t>Zero-shot</a:t>
+            </a:r>
+            <a:r>
               <a:rPr lang="es-CL" sz="2400" dirty="0">
                 <a:solidFill>
                   <a:srgbClr val="1F2937"/>
                 </a:solidFill>
               </a:rPr>
-              <a:t>Claridad, rol definido, contexto suficiente, restricciones explícitas, evitar ambigüedad.</a:t>
+              <a:t>: solo instrucciones.</a:t>
+            </a:r>
+          </a:p>
+          <a:p>
+            <a:pPr marL="342900" indent="-342900">
+              <a:spcBef>
+                <a:spcPts val="900"/>
+              </a:spcBef>
+              <a:buClr>
+                <a:srgbClr val="0E7490"/>
+              </a:buClr>
+              <a:buFont typeface="Arial"/>
+              <a:buChar char="•"/>
+            </a:pPr>
+            <a:r>
+              <a:rPr lang="es-CL" sz="2400" b="1" dirty="0">
+                <a:solidFill>
+                  <a:srgbClr val="1F2937"/>
+                </a:solidFill>
+              </a:rPr>
+              <a:t>Few-shot</a:t>
+            </a:r>
+            <a:r>
+              <a:rPr lang="es-CL" sz="2400" dirty="0">
+                <a:solidFill>
+                  <a:srgbClr val="1F2937"/>
+                </a:solidFill>
+              </a:rPr>
+              <a:t>: instrucciones más ejemplos de entrada y salida.</a:t>
+            </a:r>
+          </a:p>
+          <a:p>
+            <a:pPr marL="342900" indent="-342900">
+              <a:spcBef>
+                <a:spcPts val="900"/>
+              </a:spcBef>
+              <a:buClr>
+                <a:srgbClr val="0E7490"/>
+              </a:buClr>
+              <a:buFont typeface="Arial"/>
+              <a:buChar char="•"/>
+            </a:pPr>
+            <a:r>
+              <a:rPr lang="es-CL" sz="2400" b="1" dirty="0">
+                <a:solidFill>
+                  <a:srgbClr val="1F2937"/>
+                </a:solidFill>
+              </a:rPr>
+              <a:t>Instruccional</a:t>
+            </a:r>
+            <a:r>
+              <a:rPr lang="es-CL" sz="2400" dirty="0">
+                <a:solidFill>
+                  <a:srgbClr val="1F2937"/>
+                </a:solidFill>
+              </a:rPr>
+              <a:t>: pasos explícitos a seguir.</a:t>
             </a:r>
           </a:p>
         </p:txBody>
@@ -1761,7 +2323,7 @@
                   <a:srgbClr val="6B7280"/>
                 </a:solidFill>
               </a:rPr>
-              <a:t>PF1822 · Módulo 2 · Cápsula 3 · AE3</a:t>
+              <a:t>PF1822 · Módulo 2 · Cápsula 3 · Aprendizaje esperado 3</a:t>
             </a:r>
           </a:p>
         </p:txBody>
@@ -1815,14 +2377,57 @@
       </p:sp>
       <p:sp>
         <p:nvSpPr>
+          <p:cNvPr id="7" name="Etiqueta"/>
+          <p:cNvSpPr txBox="1"/>
+          <p:nvPr/>
+        </p:nvSpPr>
+        <p:spPr>
+          <a:xfrm>
+            <a:off x="609600" y="228600"/>
+            <a:ext cx="7315200" cy="914400"/>
+          </a:xfrm>
+          <a:prstGeom prst="rect">
+            <a:avLst/>
+          </a:prstGeom>
+          <a:noFill/>
+        </p:spPr>
+        <p:txBody>
+          <a:bodyPr wrap="square" lIns="0" rIns="0" anchor="b">
+            <a:normAutofit/>
+          </a:bodyPr>
+          <a:lstStyle/>
+          <a:p>
+            <a:r>
+              <a:rPr lang="es-CL" sz="1200" b="1" dirty="0">
+                <a:solidFill>
+                  <a:srgbClr val="0E7490"/>
+                </a:solidFill>
+              </a:rPr>
+              <a:t>CONTENIDO DEL PLAN (TEXTUAL)</a:t>
+            </a:r>
+          </a:p>
+          <a:p>
+            <a:r>
+              <a:rPr lang="es-CL" sz="1200" b="1" dirty="0">
+                <a:solidFill>
+                  <a:srgbClr val="0F3D5E"/>
+                </a:solidFill>
+              </a:rPr>
+              <a:t>PRÁCTICAS RECOMENDADAS: CLARIDAD, DELIMITACIÓN DEL ROL, CONTEXTO, RESTRICCIONES Y EVITAR AMBIGÜEDAD.</a:t>
+            </a:r>
+          </a:p>
+        </p:txBody>
+      </p:sp>
+      <p:sp>
+        <p:nvSpPr>
           <p:cNvPr id="3" name="Título"/>
           <p:cNvSpPr txBox="1"/>
           <p:nvPr/>
         </p:nvSpPr>
         <p:spPr>
           <a:xfrm>
-            <a:off x="609600" y="381000"/>
-            <a:ext cx="7315200" cy="990600"/>
+            <a:off x="609600" y="1181100"/>
+            <a:ext cx="7315200" cy="685800"/>
           </a:xfrm>
           <a:prstGeom prst="rect">
             <a:avLst/>
@@ -1836,12 +2441,12 @@
           <a:lstStyle/>
           <a:p>
             <a:r>
-              <a:rPr lang="es-CL" sz="3200" b="1" dirty="0">
+              <a:rPr lang="es-CL" sz="2800" b="1" dirty="0">
                 <a:solidFill>
                   <a:srgbClr val="0F3D5E"/>
                 </a:solidFill>
               </a:rPr>
-              <a:t>Formato de salida</a:t>
+              <a:t>Buenas prácticas</a:t>
             </a:r>
           </a:p>
         </p:txBody>
@@ -1854,7 +2459,7 @@
         </p:nvSpPr>
         <p:spPr>
           <a:xfrm>
-            <a:off x="609600" y="1447800"/>
+            <a:off x="609600" y="1943100"/>
             <a:ext cx="1066800" cy="50800"/>
           </a:xfrm>
           <a:prstGeom prst="rect">
@@ -1876,8 +2481,8 @@
         </p:nvSpPr>
         <p:spPr>
           <a:xfrm>
-            <a:off x="609600" y="1676400"/>
-            <a:ext cx="7315200" cy="4419600"/>
+            <a:off x="609600" y="2095500"/>
+            <a:ext cx="7315200" cy="4000500"/>
           </a:xfrm>
           <a:prstGeom prst="rect">
             <a:avLst/>
@@ -1906,7 +2511,7 @@
                   <a:srgbClr val="1F2937"/>
                 </a:solidFill>
               </a:rPr>
-              <a:t>Pedir listas, JSON o tablas cuando otro programa va a leer la respuesta.</a:t>
+              <a:t>Claridad, rol definido, contexto suficiente, restricciones explícitas, evitar ambigüedad.</a:t>
             </a:r>
           </a:p>
         </p:txBody>
@@ -1939,7 +2544,7 @@
                   <a:srgbClr val="6B7280"/>
                 </a:solidFill>
               </a:rPr>
-              <a:t>PF1822 · Módulo 2 · Cápsula 3 · AE3</a:t>
+              <a:t>PF1822 · Módulo 2 · Cápsula 3 · Aprendizaje esperado 3</a:t>
             </a:r>
           </a:p>
         </p:txBody>
@@ -1993,14 +2598,57 @@
       </p:sp>
       <p:sp>
         <p:nvSpPr>
+          <p:cNvPr id="7" name="Etiqueta"/>
+          <p:cNvSpPr txBox="1"/>
+          <p:nvPr/>
+        </p:nvSpPr>
+        <p:spPr>
+          <a:xfrm>
+            <a:off x="609600" y="228600"/>
+            <a:ext cx="7315200" cy="914400"/>
+          </a:xfrm>
+          <a:prstGeom prst="rect">
+            <a:avLst/>
+          </a:prstGeom>
+          <a:noFill/>
+        </p:spPr>
+        <p:txBody>
+          <a:bodyPr wrap="square" lIns="0" rIns="0" anchor="b">
+            <a:normAutofit/>
+          </a:bodyPr>
+          <a:lstStyle/>
+          <a:p>
+            <a:r>
+              <a:rPr lang="es-CL" sz="1200" b="1" dirty="0">
+                <a:solidFill>
+                  <a:srgbClr val="0E7490"/>
+                </a:solidFill>
+              </a:rPr>
+              <a:t>CONTENIDO DEL PLAN (TEXTUAL)</a:t>
+            </a:r>
+          </a:p>
+          <a:p>
+            <a:r>
+              <a:rPr lang="es-CL" sz="1200" b="1" dirty="0">
+                <a:solidFill>
+                  <a:srgbClr val="0F3D5E"/>
+                </a:solidFill>
+              </a:rPr>
+              <a:t>FORMATEO DE SALIDAS: LISTAS, JSON Y ESTRUCTURA TABULAR.</a:t>
+            </a:r>
+          </a:p>
+        </p:txBody>
+      </p:sp>
+      <p:sp>
+        <p:nvSpPr>
           <p:cNvPr id="3" name="Título"/>
           <p:cNvSpPr txBox="1"/>
           <p:nvPr/>
         </p:nvSpPr>
         <p:spPr>
           <a:xfrm>
-            <a:off x="609600" y="381000"/>
-            <a:ext cx="7315200" cy="990600"/>
+            <a:off x="609600" y="1181100"/>
+            <a:ext cx="7315200" cy="685800"/>
           </a:xfrm>
           <a:prstGeom prst="rect">
             <a:avLst/>
@@ -2014,12 +2662,12 @@
           <a:lstStyle/>
           <a:p>
             <a:r>
-              <a:rPr lang="es-CL" sz="3200" b="1" dirty="0">
+              <a:rPr lang="es-CL" sz="2800" b="1" dirty="0">
                 <a:solidFill>
                   <a:srgbClr val="0F3D5E"/>
                 </a:solidFill>
               </a:rPr>
-              <a:t>Ejemplos prácticos</a:t>
+              <a:t>Formato de salida</a:t>
             </a:r>
           </a:p>
         </p:txBody>
@@ -2032,7 +2680,7 @@
         </p:nvSpPr>
         <p:spPr>
           <a:xfrm>
-            <a:off x="609600" y="1447800"/>
+            <a:off x="609600" y="1943100"/>
             <a:ext cx="1066800" cy="50800"/>
           </a:xfrm>
           <a:prstGeom prst="rect">
@@ -2054,8 +2702,8 @@
         </p:nvSpPr>
         <p:spPr>
           <a:xfrm>
-            <a:off x="609600" y="1676400"/>
-            <a:ext cx="7315200" cy="4419600"/>
+            <a:off x="609600" y="2095500"/>
+            <a:ext cx="7315200" cy="4000500"/>
           </a:xfrm>
           <a:prstGeom prst="rect">
             <a:avLst/>
@@ -2084,7 +2732,7 @@
                   <a:srgbClr val="1F2937"/>
                 </a:solidFill>
               </a:rPr>
-              <a:t>Un prompt para generar código, uno para resumir, uno para validar y uno para reformular, con su salida.</a:t>
+              <a:t>Pedir listas, JSON o tablas cuando otro programa va a leer la respuesta.</a:t>
             </a:r>
           </a:p>
         </p:txBody>
@@ -2117,7 +2765,7 @@
                   <a:srgbClr val="6B7280"/>
                 </a:solidFill>
               </a:rPr>
-              <a:t>PF1822 · Módulo 2 · Cápsula 3 · AE3</a:t>
+              <a:t>PF1822 · Módulo 2 · Cápsula 3 · Aprendizaje esperado 3</a:t>
             </a:r>
           </a:p>
         </p:txBody>
@@ -2171,14 +2819,57 @@
       </p:sp>
       <p:sp>
         <p:nvSpPr>
+          <p:cNvPr id="7" name="Etiqueta"/>
+          <p:cNvSpPr txBox="1"/>
+          <p:nvPr/>
+        </p:nvSpPr>
+        <p:spPr>
+          <a:xfrm>
+            <a:off x="609600" y="228600"/>
+            <a:ext cx="7315200" cy="914400"/>
+          </a:xfrm>
+          <a:prstGeom prst="rect">
+            <a:avLst/>
+          </a:prstGeom>
+          <a:noFill/>
+        </p:spPr>
+        <p:txBody>
+          <a:bodyPr wrap="square" lIns="0" rIns="0" anchor="b">
+            <a:normAutofit/>
+          </a:bodyPr>
+          <a:lstStyle/>
+          <a:p>
+            <a:r>
+              <a:rPr lang="es-CL" sz="1200" b="1" dirty="0">
+                <a:solidFill>
+                  <a:srgbClr val="0E7490"/>
+                </a:solidFill>
+              </a:rPr>
+              <a:t>CONTENIDO DEL PLAN (TEXTUAL)</a:t>
+            </a:r>
+          </a:p>
+          <a:p>
+            <a:r>
+              <a:rPr lang="es-CL" sz="1200" b="1" dirty="0">
+                <a:solidFill>
+                  <a:srgbClr val="0F3D5E"/>
+                </a:solidFill>
+              </a:rPr>
+              <a:t>EJEMPLOS PRÁCTICOS: PROMPT PARA GENERAR CÓDIGO, RESUMEN, VALIDACIÓN Y REFORMULACIÓN.</a:t>
+            </a:r>
+          </a:p>
+        </p:txBody>
+      </p:sp>
+      <p:sp>
+        <p:nvSpPr>
           <p:cNvPr id="3" name="Título"/>
           <p:cNvSpPr txBox="1"/>
           <p:nvPr/>
         </p:nvSpPr>
         <p:spPr>
           <a:xfrm>
-            <a:off x="609600" y="381000"/>
-            <a:ext cx="7315200" cy="990600"/>
+            <a:off x="609600" y="1181100"/>
+            <a:ext cx="7315200" cy="685800"/>
           </a:xfrm>
           <a:prstGeom prst="rect">
             <a:avLst/>
@@ -2192,12 +2883,12 @@
           <a:lstStyle/>
           <a:p>
             <a:r>
-              <a:rPr lang="es-CL" sz="3200" b="1" dirty="0">
+              <a:rPr lang="es-CL" sz="2800" b="1" dirty="0">
                 <a:solidFill>
                   <a:srgbClr val="0F3D5E"/>
                 </a:solidFill>
               </a:rPr>
-              <a:t>Parámetros</a:t>
+              <a:t>Ejemplos prácticos</a:t>
             </a:r>
           </a:p>
         </p:txBody>
@@ -2210,7 +2901,7 @@
         </p:nvSpPr>
         <p:spPr>
           <a:xfrm>
-            <a:off x="609600" y="1447800"/>
+            <a:off x="609600" y="1943100"/>
             <a:ext cx="1066800" cy="50800"/>
           </a:xfrm>
           <a:prstGeom prst="rect">
@@ -2232,8 +2923,8 @@
         </p:nvSpPr>
         <p:spPr>
           <a:xfrm>
-            <a:off x="609600" y="1676400"/>
-            <a:ext cx="7315200" cy="4419600"/>
+            <a:off x="609600" y="2095500"/>
+            <a:ext cx="7315200" cy="4000500"/>
           </a:xfrm>
           <a:prstGeom prst="rect">
             <a:avLst/>
@@ -2257,72 +2948,12 @@
               <a:buChar char="•"/>
             </a:pPr>
             <a:r>
-              <a:rPr lang="es-CL" sz="2400" b="1" dirty="0">
+              <a:rPr lang="es-CL" sz="2400" dirty="0">
                 <a:solidFill>
                   <a:srgbClr val="1F2937"/>
                 </a:solidFill>
               </a:rPr>
-              <a:t>temperature</a:t>
-            </a:r>
-            <a:r>
-              <a:rPr lang="es-CL" sz="2400" dirty="0">
-                <a:solidFill>
-                  <a:srgbClr val="1F2937"/>
-                </a:solidFill>
-              </a:rPr>
-              <a:t> (variedad), </a:t>
-            </a:r>
-            <a:r>
-              <a:rPr lang="es-CL" sz="2400" b="1" dirty="0">
-                <a:solidFill>
-                  <a:srgbClr val="1F2937"/>
-                </a:solidFill>
-              </a:rPr>
-              <a:t>max_tokens</a:t>
-            </a:r>
-            <a:r>
-              <a:rPr lang="es-CL" sz="2400" dirty="0">
-                <a:solidFill>
-                  <a:srgbClr val="1F2937"/>
-                </a:solidFill>
-              </a:rPr>
-              <a:t> (largo máximo), </a:t>
-            </a:r>
-            <a:r>
-              <a:rPr lang="es-CL" sz="2400" b="1" dirty="0">
-                <a:solidFill>
-                  <a:srgbClr val="1F2937"/>
-                </a:solidFill>
-              </a:rPr>
-              <a:t>top_p</a:t>
-            </a:r>
-            <a:r>
-              <a:rPr lang="es-CL" sz="2400" dirty="0">
-                <a:solidFill>
-                  <a:srgbClr val="1F2937"/>
-                </a:solidFill>
-              </a:rPr>
-              <a:t> (acota las opciones).</a:t>
-            </a:r>
-          </a:p>
-          <a:p>
-            <a:pPr marL="342900" indent="-342900">
-              <a:spcBef>
-                <a:spcPts val="900"/>
-              </a:spcBef>
-              <a:buClr>
-                <a:srgbClr val="0E7490"/>
-              </a:buClr>
-              <a:buFont typeface="Arial"/>
-              <a:buChar char="•"/>
-            </a:pPr>
-            <a:r>
-              <a:rPr lang="es-CL" sz="2400" dirty="0">
-                <a:solidFill>
-                  <a:srgbClr val="1F2937"/>
-                </a:solidFill>
-              </a:rPr>
-              <a:t>Para resúmenes, temperature baja.</a:t>
+              <a:t>Un prompt para generar código, uno para resumir, uno para validar y uno para reformular, con su salida.</a:t>
             </a:r>
           </a:p>
         </p:txBody>
@@ -2355,7 +2986,7 @@
                   <a:srgbClr val="6B7280"/>
                 </a:solidFill>
               </a:rPr>
-              <a:t>PF1822 · Módulo 2 · Cápsula 3 · AE3</a:t>
+              <a:t>PF1822 · Módulo 2 · Cápsula 3 · Aprendizaje esperado 3</a:t>
             </a:r>
           </a:p>
         </p:txBody>
@@ -2409,14 +3040,57 @@
       </p:sp>
       <p:sp>
         <p:nvSpPr>
+          <p:cNvPr id="7" name="Etiqueta"/>
+          <p:cNvSpPr txBox="1"/>
+          <p:nvPr/>
+        </p:nvSpPr>
+        <p:spPr>
+          <a:xfrm>
+            <a:off x="609600" y="228600"/>
+            <a:ext cx="7315200" cy="914400"/>
+          </a:xfrm>
+          <a:prstGeom prst="rect">
+            <a:avLst/>
+          </a:prstGeom>
+          <a:noFill/>
+        </p:spPr>
+        <p:txBody>
+          <a:bodyPr wrap="square" lIns="0" rIns="0" anchor="b">
+            <a:normAutofit/>
+          </a:bodyPr>
+          <a:lstStyle/>
+          <a:p>
+            <a:r>
+              <a:rPr lang="es-CL" sz="1200" b="1" dirty="0">
+                <a:solidFill>
+                  <a:srgbClr val="0E7490"/>
+                </a:solidFill>
+              </a:rPr>
+              <a:t>CONTENIDO DEL PLAN (TEXTUAL)</a:t>
+            </a:r>
+          </a:p>
+          <a:p>
+            <a:r>
+              <a:rPr lang="es-CL" sz="1200" b="1" dirty="0">
+                <a:solidFill>
+                  <a:srgbClr val="0F3D5E"/>
+                </a:solidFill>
+              </a:rPr>
+              <a:t>PROMPT Y PARÁMETROS: CÓMO INFLUYEN TEMPERATURE, MAX_TOKENS Y TOP_P.</a:t>
+            </a:r>
+          </a:p>
+        </p:txBody>
+      </p:sp>
+      <p:sp>
+        <p:nvSpPr>
           <p:cNvPr id="3" name="Título"/>
           <p:cNvSpPr txBox="1"/>
           <p:nvPr/>
         </p:nvSpPr>
         <p:spPr>
           <a:xfrm>
-            <a:off x="609600" y="381000"/>
-            <a:ext cx="7315200" cy="990600"/>
+            <a:off x="609600" y="1181100"/>
+            <a:ext cx="7315200" cy="685800"/>
           </a:xfrm>
           <a:prstGeom prst="rect">
             <a:avLst/>
@@ -2430,12 +3104,12 @@
           <a:lstStyle/>
           <a:p>
             <a:r>
-              <a:rPr lang="es-CL" sz="3200" b="1" dirty="0">
+              <a:rPr lang="es-CL" sz="2800" b="1" dirty="0">
                 <a:solidFill>
                   <a:srgbClr val="0F3D5E"/>
                 </a:solidFill>
               </a:rPr>
-              <a:t>Limitaciones</a:t>
+              <a:t>Parámetros</a:t>
             </a:r>
           </a:p>
         </p:txBody>
@@ -2448,7 +3122,7 @@
         </p:nvSpPr>
         <p:spPr>
           <a:xfrm>
-            <a:off x="609600" y="1447800"/>
+            <a:off x="609600" y="1943100"/>
             <a:ext cx="1066800" cy="50800"/>
           </a:xfrm>
           <a:prstGeom prst="rect">
@@ -2470,8 +3144,8 @@
         </p:nvSpPr>
         <p:spPr>
           <a:xfrm>
-            <a:off x="609600" y="1676400"/>
-            <a:ext cx="7315200" cy="4419600"/>
+            <a:off x="609600" y="2095500"/>
+            <a:ext cx="7315200" cy="4000500"/>
           </a:xfrm>
           <a:prstGeom prst="rect">
             <a:avLst/>
@@ -2495,12 +3169,72 @@
               <a:buChar char="•"/>
             </a:pPr>
             <a:r>
+              <a:rPr lang="es-CL" sz="2400" b="1" dirty="0">
+                <a:solidFill>
+                  <a:srgbClr val="1F2937"/>
+                </a:solidFill>
+              </a:rPr>
+              <a:t>temperature</a:t>
+            </a:r>
+            <a:r>
               <a:rPr lang="es-CL" sz="2400" dirty="0">
                 <a:solidFill>
                   <a:srgbClr val="1F2937"/>
                 </a:solidFill>
               </a:rPr>
-              <a:t>Alucinaciones, falta de control, sensibilidad a la redacción: un cambio pequeño de palabras cambia la respuesta.</a:t>
+              <a:t> (variedad), </a:t>
+            </a:r>
+            <a:r>
+              <a:rPr lang="es-CL" sz="2400" b="1" dirty="0">
+                <a:solidFill>
+                  <a:srgbClr val="1F2937"/>
+                </a:solidFill>
+              </a:rPr>
+              <a:t>max_tokens</a:t>
+            </a:r>
+            <a:r>
+              <a:rPr lang="es-CL" sz="2400" dirty="0">
+                <a:solidFill>
+                  <a:srgbClr val="1F2937"/>
+                </a:solidFill>
+              </a:rPr>
+              <a:t> (largo máximo), </a:t>
+            </a:r>
+            <a:r>
+              <a:rPr lang="es-CL" sz="2400" b="1" dirty="0">
+                <a:solidFill>
+                  <a:srgbClr val="1F2937"/>
+                </a:solidFill>
+              </a:rPr>
+              <a:t>top_p</a:t>
+            </a:r>
+            <a:r>
+              <a:rPr lang="es-CL" sz="2400" dirty="0">
+                <a:solidFill>
+                  <a:srgbClr val="1F2937"/>
+                </a:solidFill>
+              </a:rPr>
+              <a:t> (acota las opciones).</a:t>
+            </a:r>
+          </a:p>
+          <a:p>
+            <a:pPr marL="342900" indent="-342900">
+              <a:spcBef>
+                <a:spcPts val="900"/>
+              </a:spcBef>
+              <a:buClr>
+                <a:srgbClr val="0E7490"/>
+              </a:buClr>
+              <a:buFont typeface="Arial"/>
+              <a:buChar char="•"/>
+            </a:pPr>
+            <a:r>
+              <a:rPr lang="es-CL" sz="2400" dirty="0">
+                <a:solidFill>
+                  <a:srgbClr val="1F2937"/>
+                </a:solidFill>
+              </a:rPr>
+              <a:t>Para resúmenes, temperature baja.</a:t>
             </a:r>
           </a:p>
         </p:txBody>
@@ -2533,7 +3267,7 @@
                   <a:srgbClr val="6B7280"/>
                 </a:solidFill>
               </a:rPr>
-              <a:t>PF1822 · Módulo 2 · Cápsula 3 · AE3</a:t>
+              <a:t>PF1822 · Módulo 2 · Cápsula 3 · Aprendizaje esperado 3</a:t>
             </a:r>
           </a:p>
         </p:txBody>
@@ -2587,14 +3321,57 @@
       </p:sp>
       <p:sp>
         <p:nvSpPr>
+          <p:cNvPr id="7" name="Etiqueta"/>
+          <p:cNvSpPr txBox="1"/>
+          <p:nvPr/>
+        </p:nvSpPr>
+        <p:spPr>
+          <a:xfrm>
+            <a:off x="609600" y="228600"/>
+            <a:ext cx="7315200" cy="914400"/>
+          </a:xfrm>
+          <a:prstGeom prst="rect">
+            <a:avLst/>
+          </a:prstGeom>
+          <a:noFill/>
+        </p:spPr>
+        <p:txBody>
+          <a:bodyPr wrap="square" lIns="0" rIns="0" anchor="b">
+            <a:normAutofit/>
+          </a:bodyPr>
+          <a:lstStyle/>
+          <a:p>
+            <a:r>
+              <a:rPr lang="es-CL" sz="1200" b="1" dirty="0">
+                <a:solidFill>
+                  <a:srgbClr val="0E7490"/>
+                </a:solidFill>
+              </a:rPr>
+              <a:t>CONTENIDO DEL PLAN (TEXTUAL)</a:t>
+            </a:r>
+          </a:p>
+          <a:p>
+            <a:r>
+              <a:rPr lang="es-CL" sz="1200" b="1" dirty="0">
+                <a:solidFill>
+                  <a:srgbClr val="0F3D5E"/>
+                </a:solidFill>
+              </a:rPr>
+              <a:t>LIMITACIONES: ALUCINACIONES, FALTA DE CONTROL Y SENSIBILIDAD AL WORDING.</a:t>
+            </a:r>
+          </a:p>
+        </p:txBody>
+      </p:sp>
+      <p:sp>
+        <p:nvSpPr>
           <p:cNvPr id="3" name="Título"/>
           <p:cNvSpPr txBox="1"/>
           <p:nvPr/>
         </p:nvSpPr>
         <p:spPr>
           <a:xfrm>
-            <a:off x="609600" y="381000"/>
-            <a:ext cx="7315200" cy="990600"/>
+            <a:off x="609600" y="1181100"/>
+            <a:ext cx="7315200" cy="685800"/>
           </a:xfrm>
           <a:prstGeom prst="rect">
             <a:avLst/>
@@ -2608,12 +3385,12 @@
           <a:lstStyle/>
           <a:p>
             <a:r>
-              <a:rPr lang="es-CL" sz="3200" b="1" dirty="0">
+              <a:rPr lang="es-CL" sz="2800" b="1" dirty="0">
                 <a:solidFill>
                   <a:srgbClr val="0F3D5E"/>
                 </a:solidFill>
               </a:rPr>
-              <a:t>Iterar</a:t>
+              <a:t>Limitaciones</a:t>
             </a:r>
           </a:p>
         </p:txBody>
@@ -2626,7 +3403,7 @@
         </p:nvSpPr>
         <p:spPr>
           <a:xfrm>
-            <a:off x="609600" y="1447800"/>
+            <a:off x="609600" y="1943100"/>
             <a:ext cx="1066800" cy="50800"/>
           </a:xfrm>
           <a:prstGeom prst="rect">
@@ -2648,8 +3425,8 @@
         </p:nvSpPr>
         <p:spPr>
           <a:xfrm>
-            <a:off x="609600" y="1676400"/>
-            <a:ext cx="7315200" cy="4419600"/>
+            <a:off x="609600" y="2095500"/>
+            <a:ext cx="7315200" cy="4000500"/>
           </a:xfrm>
           <a:prstGeom prst="rect">
             <a:avLst/>
@@ -2678,7 +3455,7 @@
                   <a:srgbClr val="1F2937"/>
                 </a:solidFill>
               </a:rPr>
-              <a:t>Cambiar una cosa a la vez, anotar qué cambió y qué efecto tuvo, y decidir con los resultados.</a:t>
+              <a:t>Alucinaciones, falta de control, sensibilidad a la redacción: un cambio pequeño de palabras cambia la respuesta.</a:t>
             </a:r>
           </a:p>
         </p:txBody>
@@ -2711,7 +3488,7 @@
                   <a:srgbClr val="6B7280"/>
                 </a:solidFill>
               </a:rPr>
-              <a:t>PF1822 · Módulo 2 · Cápsula 3 · AE3</a:t>
+              <a:t>PF1822 · Módulo 2 · Cápsula 3 · Aprendizaje esperado 3</a:t>
             </a:r>
           </a:p>
         </p:txBody>
